--- a/Pillar3-Instruction-and-Modelling-facilitator-deck.pptx
+++ b/Pillar3-Instruction-and-Modelling-facilitator-deck.pptx
@@ -7118,7 +7118,7 @@
                 <a:ea typeface="Century Gothic" pitchFamily="34" charset="-122"/>
                 <a:cs typeface="Century Gothic" pitchFamily="34" charset="-120"/>
               </a:rPr>
-              <a:t>Subject teams</a:t>
+              <a:t>Class teams</a:t>
             </a:r>
             <a:endParaRPr lang="en-US" sz="1350" dirty="0"/>
           </a:p>
@@ -7138,7 +7138,7 @@
                 <a:ea typeface="Century Gothic" pitchFamily="34" charset="-122"/>
                 <a:cs typeface="Century Gothic" pitchFamily="34" charset="-120"/>
               </a:rPr>
-              <a:t>adapting each method to the subject</a:t>
+              <a:t>adapting each method to your class</a:t>
             </a:r>
             <a:endParaRPr lang="en-US" sz="1350" dirty="0"/>
           </a:p>
@@ -7998,7 +7998,7 @@
                 <a:ea typeface="Century Gothic" pitchFamily="34" charset="-122"/>
                 <a:cs typeface="Century Gothic" pitchFamily="34" charset="-120"/>
               </a:rPr>
-              <a:t>Two ways to explain the same idea</a:t>
+              <a:t>Explaining so pupils can follow</a:t>
             </a:r>
             <a:endParaRPr lang="en-US" sz="2700" dirty="0"/>
           </a:p>
@@ -8106,7 +8106,7 @@
                 <a:ea typeface="Century Gothic" pitchFamily="34" charset="-122"/>
                 <a:cs typeface="Century Gothic" pitchFamily="34" charset="-120"/>
               </a:rPr>
-              <a:t>The muddled model</a:t>
+              <a:t>An unclear explanation</a:t>
             </a:r>
             <a:endParaRPr lang="en-US" sz="1600" dirty="0"/>
           </a:p>
@@ -8320,7 +8320,7 @@
                 <a:ea typeface="Century Gothic" pitchFamily="34" charset="-122"/>
                 <a:cs typeface="Century Gothic" pitchFamily="34" charset="-120"/>
               </a:rPr>
-              <a:t>The clear model</a:t>
+              <a:t>A clear explanation</a:t>
             </a:r>
             <a:endParaRPr lang="en-US" sz="1600" dirty="0"/>
           </a:p>
@@ -8712,7 +8712,7 @@
                 <a:ea typeface="Century Gothic" pitchFamily="34" charset="-122"/>
                 <a:cs typeface="Century Gothic" pitchFamily="34" charset="-120"/>
               </a:rPr>
-              <a:t>Get the explanation right and much of the rest follows. Get it wrong and no amount of marking repairs it.</a:t>
+              <a:t>When the explanation is clear, much of the rest of the lesson follows. A muddled one cannot be put right by marking afterwards.</a:t>
             </a:r>
             <a:endParaRPr lang="en-US" sz="2800" dirty="0"/>
           </a:p>
@@ -11303,7 +11303,7 @@
                 <a:ea typeface="Century Gothic" pitchFamily="34" charset="-122"/>
                 <a:cs typeface="Century Gothic" pitchFamily="34" charset="-120"/>
               </a:rPr>
-              <a:t>Clarity as care</a:t>
+              <a:t>Clear explanation and the virtue of diligence</a:t>
             </a:r>
             <a:endParaRPr lang="en-US" sz="2700" dirty="0"/>
           </a:p>

--- a/Pillar3-Instruction-and-Modelling-facilitator-deck.pptx
+++ b/Pillar3-Instruction-and-Modelling-facilitator-deck.pptx
@@ -11736,7 +11736,7 @@
     </a:clrScheme>
     <a:fontScheme name="Office">
       <a:majorFont>
-        <a:latin typeface="Calibri Light" panose="020F0302020204030204"/>
+        <a:latin typeface="Century Gothic" panose="020F0302020204030204"/>
         <a:ea typeface=""/>
         <a:cs typeface=""/>
         <a:font script="Jpan" typeface="游ゴシック Light"/>
@@ -11788,7 +11788,7 @@
         <a:font script="Tfng" typeface="Ebrima"/>
       </a:majorFont>
       <a:minorFont>
-        <a:latin typeface="Calibri" panose="020F0502020204030204"/>
+        <a:latin typeface="Century Gothic" panose="020F0502020204030204"/>
         <a:ea typeface=""/>
         <a:cs typeface=""/>
         <a:font script="Jpan" typeface="游ゴシック"/>
